--- a/templates/business.pptx
+++ b/templates/business.pptx
@@ -234,7 +234,7 @@
           <a:p>
             <a:fld id="{1D5D4A56-4347-7E47-805C-A4CC550EB7FE}" type="datetimeFigureOut">
               <a:rPr kumimoji="1" lang="ja-JP" altLang="en-US" smtClean="0"/>
-              <a:t>2026/8/24</a:t>
+              <a:t>2026/9/27</a:t>
             </a:fld>
             <a:endParaRPr kumimoji="1" lang="ja-JP" altLang="en-US"/>
           </a:p>
@@ -427,7 +427,7 @@
           <a:p>
             <a:fld id="{1B171477-B974-724E-B5A2-6B597495C72D}" type="datetimeFigureOut">
               <a:rPr kumimoji="1" lang="ja-JP" altLang="en-US" smtClean="0"/>
-              <a:t>2026/8/24</a:t>
+              <a:t>2026/9/27</a:t>
             </a:fld>
             <a:endParaRPr kumimoji="1" lang="ja-JP" altLang="en-US"/>
           </a:p>
@@ -874,7 +874,7 @@
             <a:fld id="{A42D0FF2-8DB4-A340-91B5-0FC7B27917C5}" type="datetime1">
               <a:rPr lang="ja-JP" altLang="en-US" smtClean="0"/>
               <a:pPr/>
-              <a:t>2026/8/24</a:t>
+              <a:t>2026/9/27</a:t>
             </a:fld>
             <a:endParaRPr lang="ja-JP" altLang="en-US" dirty="0">
               <a:latin typeface="+mn-lt"/>
@@ -1573,7 +1573,7 @@
             <a:fld id="{DA2D38D8-431E-2148-A67E-C99D9FDB14AB}" type="datetime1">
               <a:rPr lang="ja-JP" altLang="en-US" smtClean="0"/>
               <a:pPr/>
-              <a:t>2026/8/24</a:t>
+              <a:t>2026/9/27</a:t>
             </a:fld>
             <a:endParaRPr lang="ja-JP" altLang="en-US" dirty="0">
               <a:latin typeface="+mn-lt"/>
@@ -2021,7 +2021,7 @@
             <a:fld id="{DA2D38D8-431E-2148-A67E-C99D9FDB14AB}" type="datetime1">
               <a:rPr lang="ja-JP" altLang="en-US" smtClean="0"/>
               <a:pPr/>
-              <a:t>2026/8/24</a:t>
+              <a:t>2026/9/27</a:t>
             </a:fld>
             <a:endParaRPr lang="ja-JP" altLang="en-US"/>
           </a:p>
@@ -2528,7 +2528,7 @@
             <a:fld id="{DA2D38D8-431E-2148-A67E-C99D9FDB14AB}" type="datetime1">
               <a:rPr lang="ja-JP" altLang="en-US" smtClean="0"/>
               <a:pPr/>
-              <a:t>2026/8/24</a:t>
+              <a:t>2026/9/27</a:t>
             </a:fld>
             <a:endParaRPr lang="ja-JP" altLang="en-US">
               <a:latin typeface="+mn-lt"/>
@@ -3182,7 +3182,7 @@
             <a:fld id="{DA2D38D8-431E-2148-A67E-C99D9FDB14AB}" type="datetime1">
               <a:rPr lang="ja-JP" altLang="en-US" smtClean="0"/>
               <a:pPr/>
-              <a:t>2026/8/24</a:t>
+              <a:t>2026/9/27</a:t>
             </a:fld>
             <a:endParaRPr lang="ja-JP" altLang="en-US">
               <a:latin typeface="+mn-lt"/>
@@ -3809,7 +3809,7 @@
             <a:fld id="{C8DD7B46-612B-4747-AC0E-56DE60A5EB0D}" type="datetime1">
               <a:rPr lang="ja-JP" altLang="en-US" smtClean="0"/>
               <a:pPr/>
-              <a:t>2026/8/24</a:t>
+              <a:t>2026/9/27</a:t>
             </a:fld>
             <a:endParaRPr lang="ja-JP" altLang="en-US">
               <a:latin typeface="+mn-lt"/>
@@ -6498,7 +6498,7 @@
           <a:p>
             <a:r>
               <a:rPr lang="ja-JP" altLang="en-US" dirty="0"/>
-              <a:t>色の規則</a:t>
+              <a:t> 色の規則</a:t>
             </a:r>
             <a:endParaRPr lang="en-US" altLang="ja-JP" dirty="0"/>
           </a:p>
